--- a/generated/Tier 1 Broker Scorecards/Transportation Risk Services LLC_Broker_Scorecard.pptx
+++ b/generated/Tier 1 Broker Scorecards/Transportation Risk Services LLC_Broker_Scorecard.pptx
@@ -3394,7 +3394,7 @@
                         <a:rPr sz="900">
                           <a:latin typeface="Segoe UI"/>
                         </a:rPr>
-                        <a:t>Tier 1  |  7.02% / 15.00%</a:t>
+                        <a:t>Tier 1  |  8.62% / 15.00%</a:t>
                       </a:r>
                     </a:p>
                   </a:txBody>
@@ -3690,7 +3690,7 @@
                         <a:rPr sz="900">
                           <a:latin typeface="Segoe UI"/>
                         </a:rPr>
-                        <a:t>Fleet Bound Premium: $67,358.32</a:t>
+                        <a:t>Fleet Bound Premium: $65,006.57</a:t>
                       </a:r>
                     </a:p>
                   </a:txBody>
@@ -3727,7 +3727,7 @@
                         <a:rPr sz="900">
                           <a:latin typeface="Segoe UI"/>
                         </a:rPr>
-                        <a:t>Fleet Book %: 87.7%</a:t>
+                        <a:t>Fleet Book %: 84.6%</a:t>
                       </a:r>
                     </a:p>
                   </a:txBody>
@@ -3766,7 +3766,7 @@
                         <a:rPr sz="900">
                           <a:latin typeface="Segoe UI"/>
                         </a:rPr>
-                        <a:t>Non-Fleet Subs: 40  |  Binds: 2</a:t>
+                        <a:t>Non-Fleet Subs: 41  |  Binds: 3</a:t>
                       </a:r>
                     </a:p>
                   </a:txBody>
@@ -3803,7 +3803,7 @@
                         <a:rPr sz="900">
                           <a:latin typeface="Segoe UI"/>
                         </a:rPr>
-                        <a:t>Non-Fleet Bound Premium: $9,486.10</a:t>
+                        <a:t>Non-Fleet Bound Premium: $11,837.85</a:t>
                       </a:r>
                     </a:p>
                   </a:txBody>
@@ -3840,7 +3840,7 @@
                         <a:rPr sz="900">
                           <a:latin typeface="Segoe UI"/>
                         </a:rPr>
-                        <a:t>Non-Fleet Book %: 12.3%</a:t>
+                        <a:t>Non-Fleet Book %: 15.4%</a:t>
                       </a:r>
                     </a:p>
                   </a:txBody>
@@ -4428,7 +4428,7 @@
                           </a:solidFill>
                           <a:latin typeface="Segoe UI"/>
                         </a:rPr>
-                        <a:t>3</a:t>
+                        <a:t>5</a:t>
                       </a:r>
                     </a:p>
                   </a:txBody>
@@ -4707,7 +4707,7 @@
                           </a:solidFill>
                           <a:latin typeface="Segoe UI"/>
                         </a:rPr>
-                        <a:t>33.3%</a:t>
+                        <a:t>40.0%</a:t>
                       </a:r>
                     </a:p>
                   </a:txBody>
@@ -4983,7 +4983,7 @@
                           </a:solidFill>
                           <a:latin typeface="Segoe UI"/>
                         </a:rPr>
-                        <a:t>1</a:t>
+                        <a:t>2</a:t>
                       </a:r>
                     </a:p>
                   </a:txBody>

--- a/generated/Tier 1 Broker Scorecards/Transportation Risk Services LLC_Broker_Scorecard.pptx
+++ b/generated/Tier 1 Broker Scorecards/Transportation Risk Services LLC_Broker_Scorecard.pptx
@@ -3394,7 +3394,7 @@
                         <a:rPr sz="900">
                           <a:latin typeface="Segoe UI"/>
                         </a:rPr>
-                        <a:t>Tier 1  |  8.62% / 15.00%</a:t>
+                        <a:t>Tier 1  |  10.34% / 15.00%</a:t>
                       </a:r>
                     </a:p>
                   </a:txBody>
@@ -3690,7 +3690,7 @@
                         <a:rPr sz="900">
                           <a:latin typeface="Segoe UI"/>
                         </a:rPr>
-                        <a:t>Fleet Bound Premium: $65,006.57</a:t>
+                        <a:t>Fleet Bound Premium: $62,843.75</a:t>
                       </a:r>
                     </a:p>
                   </a:txBody>
@@ -3727,7 +3727,7 @@
                         <a:rPr sz="900">
                           <a:latin typeface="Segoe UI"/>
                         </a:rPr>
-                        <a:t>Fleet Book %: 84.6%</a:t>
+                        <a:t>Fleet Book %: 81.8%</a:t>
                       </a:r>
                     </a:p>
                   </a:txBody>
@@ -3766,7 +3766,7 @@
                         <a:rPr sz="900">
                           <a:latin typeface="Segoe UI"/>
                         </a:rPr>
-                        <a:t>Non-Fleet Subs: 41  |  Binds: 3</a:t>
+                        <a:t>Non-Fleet Subs: 41  |  Binds: 4</a:t>
                       </a:r>
                     </a:p>
                   </a:txBody>
@@ -3803,7 +3803,7 @@
                         <a:rPr sz="900">
                           <a:latin typeface="Segoe UI"/>
                         </a:rPr>
-                        <a:t>Non-Fleet Bound Premium: $11,837.85</a:t>
+                        <a:t>Non-Fleet Bound Premium: $14,000.67</a:t>
                       </a:r>
                     </a:p>
                   </a:txBody>
@@ -3840,7 +3840,7 @@
                         <a:rPr sz="900">
                           <a:latin typeface="Segoe UI"/>
                         </a:rPr>
-                        <a:t>Non-Fleet Book %: 15.4%</a:t>
+                        <a:t>Non-Fleet Book %: 18.2%</a:t>
                       </a:r>
                     </a:p>
                   </a:txBody>

--- a/generated/Tier 1 Broker Scorecards/Transportation Risk Services LLC_Broker_Scorecard.pptx
+++ b/generated/Tier 1 Broker Scorecards/Transportation Risk Services LLC_Broker_Scorecard.pptx
@@ -3394,7 +3394,7 @@
                         <a:rPr sz="900">
                           <a:latin typeface="Segoe UI"/>
                         </a:rPr>
-                        <a:t>Tier 1  |  10.34% / 15.00%</a:t>
+                        <a:t>Tier 1  |  8.62% / 15.00%</a:t>
                       </a:r>
                     </a:p>
                   </a:txBody>
@@ -3690,7 +3690,7 @@
                         <a:rPr sz="900">
                           <a:latin typeface="Segoe UI"/>
                         </a:rPr>
-                        <a:t>Fleet Bound Premium: $62,843.75</a:t>
+                        <a:t>Fleet Bound Premium: $65,006.57</a:t>
                       </a:r>
                     </a:p>
                   </a:txBody>
@@ -3727,7 +3727,7 @@
                         <a:rPr sz="900">
                           <a:latin typeface="Segoe UI"/>
                         </a:rPr>
-                        <a:t>Fleet Book %: 81.8%</a:t>
+                        <a:t>Fleet Book %: 84.6%</a:t>
                       </a:r>
                     </a:p>
                   </a:txBody>
@@ -3766,7 +3766,7 @@
                         <a:rPr sz="900">
                           <a:latin typeface="Segoe UI"/>
                         </a:rPr>
-                        <a:t>Non-Fleet Subs: 41  |  Binds: 4</a:t>
+                        <a:t>Non-Fleet Subs: 41  |  Binds: 3</a:t>
                       </a:r>
                     </a:p>
                   </a:txBody>
@@ -3803,7 +3803,7 @@
                         <a:rPr sz="900">
                           <a:latin typeface="Segoe UI"/>
                         </a:rPr>
-                        <a:t>Non-Fleet Bound Premium: $14,000.67</a:t>
+                        <a:t>Non-Fleet Bound Premium: $11,837.85</a:t>
                       </a:r>
                     </a:p>
                   </a:txBody>
@@ -3840,7 +3840,7 @@
                         <a:rPr sz="900">
                           <a:latin typeface="Segoe UI"/>
                         </a:rPr>
-                        <a:t>Non-Fleet Book %: 18.2%</a:t>
+                        <a:t>Non-Fleet Book %: 15.4%</a:t>
                       </a:r>
                     </a:p>
                   </a:txBody>

--- a/generated/Tier 1 Broker Scorecards/Transportation Risk Services LLC_Broker_Scorecard.pptx
+++ b/generated/Tier 1 Broker Scorecards/Transportation Risk Services LLC_Broker_Scorecard.pptx
@@ -3357,7 +3357,7 @@
                         <a:rPr sz="800">
                           <a:latin typeface="Segoe UI"/>
                         </a:rPr>
-                        <a:t>$1,146,562.76 / $897,831.83 / $76,844.42</a:t>
+                        <a:t>$1,146,562.76 / $901,339.06 / $80,351.65</a:t>
                       </a:r>
                     </a:p>
                   </a:txBody>
@@ -3394,7 +3394,7 @@
                         <a:rPr sz="900">
                           <a:latin typeface="Segoe UI"/>
                         </a:rPr>
-                        <a:t>Tier 1  |  8.62% / 15.00%</a:t>
+                        <a:t>Tier 1  |  10.34% / 15.00%</a:t>
                       </a:r>
                     </a:p>
                   </a:txBody>
@@ -3431,7 +3431,7 @@
                         <a:rPr sz="900">
                           <a:latin typeface="Segoe UI"/>
                         </a:rPr>
-                        <a:t>$1,605,187.86  (4.8% achieved)</a:t>
+                        <a:t>$1,605,187.86  (5.0% achieved)</a:t>
                       </a:r>
                     </a:p>
                   </a:txBody>
@@ -3690,7 +3690,7 @@
                         <a:rPr sz="900">
                           <a:latin typeface="Segoe UI"/>
                         </a:rPr>
-                        <a:t>Fleet Bound Premium: $65,006.57</a:t>
+                        <a:t>Fleet Bound Premium: $65,185.68</a:t>
                       </a:r>
                     </a:p>
                   </a:txBody>
@@ -3727,7 +3727,7 @@
                         <a:rPr sz="900">
                           <a:latin typeface="Segoe UI"/>
                         </a:rPr>
-                        <a:t>Fleet Book %: 84.6%</a:t>
+                        <a:t>Fleet Book %: 81.1%</a:t>
                       </a:r>
                     </a:p>
                   </a:txBody>
@@ -3766,7 +3766,7 @@
                         <a:rPr sz="900">
                           <a:latin typeface="Segoe UI"/>
                         </a:rPr>
-                        <a:t>Non-Fleet Subs: 41  |  Binds: 3</a:t>
+                        <a:t>Non-Fleet Subs: 41  |  Binds: 4</a:t>
                       </a:r>
                     </a:p>
                   </a:txBody>
@@ -3803,7 +3803,7 @@
                         <a:rPr sz="900">
                           <a:latin typeface="Segoe UI"/>
                         </a:rPr>
-                        <a:t>Non-Fleet Bound Premium: $11,837.85</a:t>
+                        <a:t>Non-Fleet Bound Premium: $15,165.97</a:t>
                       </a:r>
                     </a:p>
                   </a:txBody>
@@ -3840,7 +3840,7 @@
                         <a:rPr sz="900">
                           <a:latin typeface="Segoe UI"/>
                         </a:rPr>
-                        <a:t>Non-Fleet Book %: 15.4%</a:t>
+                        <a:t>Non-Fleet Book %: 18.9%</a:t>
                       </a:r>
                     </a:p>
                   </a:txBody>
@@ -4707,7 +4707,7 @@
                           </a:solidFill>
                           <a:latin typeface="Segoe UI"/>
                         </a:rPr>
-                        <a:t>40.0%</a:t>
+                        <a:t>60.0%</a:t>
                       </a:r>
                     </a:p>
                   </a:txBody>
@@ -4983,7 +4983,7 @@
                           </a:solidFill>
                           <a:latin typeface="Segoe UI"/>
                         </a:rPr>
-                        <a:t>2</a:t>
+                        <a:t>3</a:t>
                       </a:r>
                     </a:p>
                   </a:txBody>
@@ -5256,10 +5256,13 @@
                     <a:p>
                       <a:pPr algn="ctr"/>
                       <a:r>
-                        <a:rPr sz="800">
+                        <a:rPr sz="800" b="1">
+                          <a:solidFill>
+                            <a:srgbClr val="DC2626"/>
+                          </a:solidFill>
                           <a:latin typeface="Segoe UI"/>
                         </a:rPr>
-                        <a:t/>
+                        <a:t>$3.1K</a:t>
                       </a:r>
                     </a:p>
                   </a:txBody>

--- a/generated/Tier 1 Broker Scorecards/Transportation Risk Services LLC_Broker_Scorecard.pptx
+++ b/generated/Tier 1 Broker Scorecards/Transportation Risk Services LLC_Broker_Scorecard.pptx
@@ -3357,7 +3357,7 @@
                         <a:rPr sz="800">
                           <a:latin typeface="Segoe UI"/>
                         </a:rPr>
-                        <a:t>$1,146,562.76 / $901,339.06 / $80,351.65</a:t>
+                        <a:t>$1,146,562.76 / $786,866.62 / $80,351.65</a:t>
                       </a:r>
                     </a:p>
                   </a:txBody>
